--- a/examples/repositories/cyberppt/pages/slide-01.pptx
+++ b/examples/repositories/cyberppt/pages/slide-01.pptx
@@ -906,7 +906,7 @@
         </p:nvSpPr>
         <p:spPr>
           <a:xfrm>
-            <a:off x="495834" y="1144215"/>
+            <a:off x="488543" y="1166079"/>
             <a:ext cx="8968771" cy="1348278"/>
           </a:xfrm>
           <a:prstGeom prst="rect">
@@ -962,7 +962,7 @@
         </p:nvSpPr>
         <p:spPr>
           <a:xfrm>
-            <a:off x="495834" y="2988077"/>
+            <a:off x="481251" y="2995365"/>
             <a:ext cx="4739594" cy="364400"/>
           </a:xfrm>
           <a:prstGeom prst="rect">
@@ -1024,8 +1024,8 @@
         </p:nvSpPr>
         <p:spPr>
           <a:xfrm>
-            <a:off x="10390649" y="255080"/>
-            <a:ext cx="1385420" cy="1166079"/>
+            <a:off x="10448983" y="109320"/>
+            <a:ext cx="1604170" cy="1457598"/>
           </a:xfrm>
           <a:prstGeom prst="rect">
             <a:avLst/>
@@ -1143,7 +1143,7 @@
         </p:nvSpPr>
         <p:spPr>
           <a:xfrm>
-            <a:off x="4943762" y="4103139"/>
+            <a:off x="4892720" y="4117715"/>
             <a:ext cx="1859379" cy="437279"/>
           </a:xfrm>
           <a:prstGeom prst="rect">
@@ -1239,7 +1239,7 @@
         </p:nvSpPr>
         <p:spPr>
           <a:xfrm>
-            <a:off x="7371892" y="4103139"/>
+            <a:off x="7335434" y="4110427"/>
             <a:ext cx="1859379" cy="437279"/>
           </a:xfrm>
           <a:prstGeom prst="rect">
@@ -1335,7 +1335,7 @@
         </p:nvSpPr>
         <p:spPr>
           <a:xfrm>
-            <a:off x="9792731" y="4103139"/>
+            <a:off x="9821898" y="4117715"/>
             <a:ext cx="1859379" cy="437279"/>
           </a:xfrm>
           <a:prstGeom prst="rect">
@@ -1484,8 +1484,8 @@
         </p:nvSpPr>
         <p:spPr>
           <a:xfrm>
-            <a:off x="8881271" y="6376993"/>
-            <a:ext cx="2843757" cy="204064"/>
+            <a:off x="291667" y="6559192"/>
+            <a:ext cx="11608361" cy="189488"/>
           </a:xfrm>
           <a:prstGeom prst="rect">
             <a:avLst/>
@@ -1501,9 +1501,9 @@
               <a:buNone/>
             </a:pPr>
             <a:r>
-              <a:rPr lang="en-US" sz="1000" dirty="0">
+              <a:rPr lang="en-US" sz="1100" dirty="0">
                 <a:solidFill>
-                  <a:srgbClr val="76716A"/>
+                  <a:srgbClr val="514B44"/>
                 </a:solidFill>
                 <a:latin typeface="Yu Gothic" pitchFamily="34" charset="0"/>
                 <a:ea typeface="Yu Gothic" pitchFamily="34" charset="-122"/>
@@ -1511,7 +1511,7 @@
               </a:rPr>
               <a:t>架空の企画例。実在の開催情報ではありません。</a:t>
             </a:r>
-            <a:endParaRPr lang="en-US" sz="1000" dirty="0"/>
+            <a:endParaRPr lang="en-US" sz="1100" dirty="0"/>
           </a:p>
         </p:txBody>
       </p:sp>
